--- a/Reporte 210826.pptx
+++ b/Reporte 210826.pptx
@@ -6419,7 +6419,7 @@
                 <a:latin typeface="Montserrat Black"/>
                 <a:sym typeface="Arial"/>
               </a:rPr>
-              <a:t>Elaborado: 20</a:t>
+              <a:t>Elaborado: 21</a:t>
             </a:r>
             <a:r>
               <a:rPr lang="es-MX" sz="1600" dirty="0">
@@ -6553,10 +6553,10 @@
       </p:sp>
       <p:pic>
         <p:nvPicPr>
-          <p:cNvPr id="5" name="Imagen 4">
+          <p:cNvPr id="4" name="Imagen 3">
             <a:extLst>
               <a:ext uri="{FF2B5EF4-FFF2-40B4-BE49-F238E27FC236}">
-                <a16:creationId xmlns:a16="http://schemas.microsoft.com/office/drawing/2014/main" id="{0D391CCB-225F-D52B-292C-38765BCDED6E}"/>
+                <a16:creationId xmlns:a16="http://schemas.microsoft.com/office/drawing/2014/main" id="{868608F1-BBE5-3158-07CA-AFA5D6A89738}"/>
               </a:ext>
             </a:extLst>
           </p:cNvPr>
@@ -6573,8 +6573,8 @@
         </p:blipFill>
         <p:spPr>
           <a:xfrm>
-            <a:off x="0" y="862087"/>
-            <a:ext cx="9144000" cy="3562202"/>
+            <a:off x="-6725" y="887055"/>
+            <a:ext cx="9144000" cy="3512265"/>
           </a:xfrm>
           <a:prstGeom prst="rect">
             <a:avLst/>
@@ -6659,10 +6659,10 @@
       </p:sp>
       <p:pic>
         <p:nvPicPr>
-          <p:cNvPr id="4" name="Imagen 3">
+          <p:cNvPr id="3" name="Imagen 2">
             <a:extLst>
               <a:ext uri="{FF2B5EF4-FFF2-40B4-BE49-F238E27FC236}">
-                <a16:creationId xmlns:a16="http://schemas.microsoft.com/office/drawing/2014/main" id="{0FCBA2F6-93CB-B0A2-359D-F88FCCF7F308}"/>
+                <a16:creationId xmlns:a16="http://schemas.microsoft.com/office/drawing/2014/main" id="{DEBF90EC-7ECC-A7B5-CAD8-F5C541AF2074}"/>
               </a:ext>
             </a:extLst>
           </p:cNvPr>
@@ -6679,8 +6679,8 @@
         </p:blipFill>
         <p:spPr>
           <a:xfrm>
-            <a:off x="0" y="1330385"/>
-            <a:ext cx="9144000" cy="2625606"/>
+            <a:off x="0" y="1303556"/>
+            <a:ext cx="9144000" cy="2679263"/>
           </a:xfrm>
           <a:prstGeom prst="rect">
             <a:avLst/>
@@ -6765,10 +6765,10 @@
       </p:sp>
       <p:pic>
         <p:nvPicPr>
-          <p:cNvPr id="4" name="Imagen 3">
+          <p:cNvPr id="5" name="Imagen 4">
             <a:extLst>
               <a:ext uri="{FF2B5EF4-FFF2-40B4-BE49-F238E27FC236}">
-                <a16:creationId xmlns:a16="http://schemas.microsoft.com/office/drawing/2014/main" id="{31E5FC2A-3739-D298-7130-F58E8D0CECBB}"/>
+                <a16:creationId xmlns:a16="http://schemas.microsoft.com/office/drawing/2014/main" id="{0A9EC498-C067-8AFD-AC23-6F4F7B7BEF3D}"/>
               </a:ext>
             </a:extLst>
           </p:cNvPr>
@@ -6785,8 +6785,8 @@
         </p:blipFill>
         <p:spPr>
           <a:xfrm>
-            <a:off x="0" y="744452"/>
-            <a:ext cx="9144000" cy="3797472"/>
+            <a:off x="0" y="1015386"/>
+            <a:ext cx="9144000" cy="3255603"/>
           </a:xfrm>
           <a:prstGeom prst="rect">
             <a:avLst/>
@@ -6871,10 +6871,10 @@
       </p:sp>
       <p:pic>
         <p:nvPicPr>
-          <p:cNvPr id="4" name="Imagen 3">
+          <p:cNvPr id="3" name="Imagen 2">
             <a:extLst>
               <a:ext uri="{FF2B5EF4-FFF2-40B4-BE49-F238E27FC236}">
-                <a16:creationId xmlns:a16="http://schemas.microsoft.com/office/drawing/2014/main" id="{56F503F8-02A8-9B90-7F06-A156111D9EC2}"/>
+                <a16:creationId xmlns:a16="http://schemas.microsoft.com/office/drawing/2014/main" id="{3A85A8F9-BA00-C2FE-2FF4-31CBD9E73B4D}"/>
               </a:ext>
             </a:extLst>
           </p:cNvPr>
@@ -6891,8 +6891,8 @@
         </p:blipFill>
         <p:spPr>
           <a:xfrm>
-            <a:off x="0" y="1288802"/>
-            <a:ext cx="9144000" cy="2708771"/>
+            <a:off x="0" y="1175739"/>
+            <a:ext cx="9144000" cy="2792022"/>
           </a:xfrm>
           <a:prstGeom prst="rect">
             <a:avLst/>
@@ -6977,10 +6977,10 @@
       </p:sp>
       <p:pic>
         <p:nvPicPr>
-          <p:cNvPr id="4" name="Imagen 3">
+          <p:cNvPr id="3" name="Imagen 2">
             <a:extLst>
               <a:ext uri="{FF2B5EF4-FFF2-40B4-BE49-F238E27FC236}">
-                <a16:creationId xmlns:a16="http://schemas.microsoft.com/office/drawing/2014/main" id="{9B3956FC-BC00-BAE9-58FF-7C8D90A73B58}"/>
+                <a16:creationId xmlns:a16="http://schemas.microsoft.com/office/drawing/2014/main" id="{502A4F44-5EBD-AA60-DD10-BDEDFFF45E00}"/>
               </a:ext>
             </a:extLst>
           </p:cNvPr>
@@ -6997,8 +6997,8 @@
         </p:blipFill>
         <p:spPr>
           <a:xfrm>
-            <a:off x="0" y="699327"/>
-            <a:ext cx="9144000" cy="3887721"/>
+            <a:off x="0" y="698628"/>
+            <a:ext cx="9144000" cy="3889119"/>
           </a:xfrm>
           <a:prstGeom prst="rect">
             <a:avLst/>
@@ -7089,10 +7089,10 @@
       </p:sp>
       <p:pic>
         <p:nvPicPr>
-          <p:cNvPr id="3" name="Imagen 2">
+          <p:cNvPr id="4" name="Imagen 3">
             <a:extLst>
               <a:ext uri="{FF2B5EF4-FFF2-40B4-BE49-F238E27FC236}">
-                <a16:creationId xmlns:a16="http://schemas.microsoft.com/office/drawing/2014/main" id="{31D026F9-5336-9465-29DA-968ACF4CDE79}"/>
+                <a16:creationId xmlns:a16="http://schemas.microsoft.com/office/drawing/2014/main" id="{4F5270AC-B374-C138-D7C9-15F9BE90EE96}"/>
               </a:ext>
             </a:extLst>
           </p:cNvPr>
@@ -7109,38 +7109,8 @@
         </p:blipFill>
         <p:spPr>
           <a:xfrm>
-            <a:off x="0" y="525013"/>
-            <a:ext cx="9144000" cy="3747873"/>
-          </a:xfrm>
-          <a:prstGeom prst="rect">
-            <a:avLst/>
-          </a:prstGeom>
-        </p:spPr>
-      </p:pic>
-      <p:pic>
-        <p:nvPicPr>
-          <p:cNvPr id="7" name="Imagen 6">
-            <a:extLst>
-              <a:ext uri="{FF2B5EF4-FFF2-40B4-BE49-F238E27FC236}">
-                <a16:creationId xmlns:a16="http://schemas.microsoft.com/office/drawing/2014/main" id="{0E698EB7-ABE9-66DD-9B9B-5C4C07B9E861}"/>
-              </a:ext>
-            </a:extLst>
-          </p:cNvPr>
-          <p:cNvPicPr>
-            <a:picLocks noChangeAspect="1"/>
-          </p:cNvPicPr>
-          <p:nvPr/>
-        </p:nvPicPr>
-        <p:blipFill>
-          <a:blip r:embed="rId3"/>
-          <a:stretch>
-            <a:fillRect/>
-          </a:stretch>
-        </p:blipFill>
-        <p:spPr>
-          <a:xfrm>
-            <a:off x="210993" y="2797625"/>
-            <a:ext cx="2429214" cy="2257740"/>
+            <a:off x="0" y="1123983"/>
+            <a:ext cx="9144000" cy="3038409"/>
           </a:xfrm>
           <a:prstGeom prst="rect">
             <a:avLst/>
@@ -7293,10 +7263,10 @@
       </p:sp>
       <p:pic>
         <p:nvPicPr>
-          <p:cNvPr id="3" name="Imagen 2">
+          <p:cNvPr id="6" name="Imagen 5">
             <a:extLst>
               <a:ext uri="{FF2B5EF4-FFF2-40B4-BE49-F238E27FC236}">
-                <a16:creationId xmlns:a16="http://schemas.microsoft.com/office/drawing/2014/main" id="{C3A46828-E304-B01C-DB98-0CD648A9C3F3}"/>
+                <a16:creationId xmlns:a16="http://schemas.microsoft.com/office/drawing/2014/main" id="{3DEC1607-5359-6886-F254-A197AAAC4BBE}"/>
               </a:ext>
             </a:extLst>
           </p:cNvPr>
@@ -7313,8 +7283,8 @@
         </p:blipFill>
         <p:spPr>
           <a:xfrm>
-            <a:off x="-36512" y="545685"/>
-            <a:ext cx="9144000" cy="4195006"/>
+            <a:off x="0" y="946287"/>
+            <a:ext cx="9144000" cy="3393802"/>
           </a:xfrm>
           <a:prstGeom prst="rect">
             <a:avLst/>
@@ -7407,10 +7377,10 @@
       </p:sp>
       <p:pic>
         <p:nvPicPr>
-          <p:cNvPr id="2" name="Imagen 1">
+          <p:cNvPr id="5" name="Imagen 4">
             <a:extLst>
               <a:ext uri="{FF2B5EF4-FFF2-40B4-BE49-F238E27FC236}">
-                <a16:creationId xmlns:a16="http://schemas.microsoft.com/office/drawing/2014/main" id="{3F305943-B505-EBB7-5B2B-190E0352260B}"/>
+                <a16:creationId xmlns:a16="http://schemas.microsoft.com/office/drawing/2014/main" id="{27564C58-5AB0-44A0-BAFA-4C7D1AB93A05}"/>
               </a:ext>
             </a:extLst>
           </p:cNvPr>
@@ -7427,38 +7397,8 @@
         </p:blipFill>
         <p:spPr>
           <a:xfrm>
-            <a:off x="1143000" y="523220"/>
-            <a:ext cx="6857999" cy="2145403"/>
-          </a:xfrm>
-          <a:prstGeom prst="rect">
-            <a:avLst/>
-          </a:prstGeom>
-        </p:spPr>
-      </p:pic>
-      <p:pic>
-        <p:nvPicPr>
-          <p:cNvPr id="3" name="Imagen 2">
-            <a:extLst>
-              <a:ext uri="{FF2B5EF4-FFF2-40B4-BE49-F238E27FC236}">
-                <a16:creationId xmlns:a16="http://schemas.microsoft.com/office/drawing/2014/main" id="{4EF009CD-D579-50C4-AA31-9B493D201C02}"/>
-              </a:ext>
-            </a:extLst>
-          </p:cNvPr>
-          <p:cNvPicPr>
-            <a:picLocks noChangeAspect="1"/>
-          </p:cNvPicPr>
-          <p:nvPr/>
-        </p:nvPicPr>
-        <p:blipFill>
-          <a:blip r:embed="rId4"/>
-          <a:stretch>
-            <a:fillRect/>
-          </a:stretch>
-        </p:blipFill>
-        <p:spPr>
-          <a:xfrm>
-            <a:off x="1143000" y="2830751"/>
-            <a:ext cx="6857999" cy="2145403"/>
+            <a:off x="0" y="1337681"/>
+            <a:ext cx="9144000" cy="2468137"/>
           </a:xfrm>
           <a:prstGeom prst="rect">
             <a:avLst/>
@@ -7551,10 +7491,10 @@
       </p:sp>
       <p:pic>
         <p:nvPicPr>
-          <p:cNvPr id="5" name="Imagen 4">
+          <p:cNvPr id="2" name="Imagen 1">
             <a:extLst>
               <a:ext uri="{FF2B5EF4-FFF2-40B4-BE49-F238E27FC236}">
-                <a16:creationId xmlns:a16="http://schemas.microsoft.com/office/drawing/2014/main" id="{5979DF96-023D-B278-E458-AECB1D84C351}"/>
+                <a16:creationId xmlns:a16="http://schemas.microsoft.com/office/drawing/2014/main" id="{6EC205BE-A0C2-CC76-F88C-AA5E6B70631F}"/>
               </a:ext>
             </a:extLst>
           </p:cNvPr>
@@ -7571,8 +7511,8 @@
         </p:blipFill>
         <p:spPr>
           <a:xfrm>
-            <a:off x="534988" y="726572"/>
-            <a:ext cx="8001000" cy="3833232"/>
+            <a:off x="1106488" y="914940"/>
+            <a:ext cx="6858000" cy="3456495"/>
           </a:xfrm>
           <a:prstGeom prst="rect">
             <a:avLst/>
@@ -7661,10 +7601,10 @@
       </p:sp>
       <p:pic>
         <p:nvPicPr>
-          <p:cNvPr id="6" name="Imagen 5">
+          <p:cNvPr id="3" name="Imagen 2">
             <a:extLst>
               <a:ext uri="{FF2B5EF4-FFF2-40B4-BE49-F238E27FC236}">
-                <a16:creationId xmlns:a16="http://schemas.microsoft.com/office/drawing/2014/main" id="{8250225A-21C4-08FA-5F77-947049668A5E}"/>
+                <a16:creationId xmlns:a16="http://schemas.microsoft.com/office/drawing/2014/main" id="{181F80EA-F2FD-3FA6-AE4D-15C9A4802C0F}"/>
               </a:ext>
             </a:extLst>
           </p:cNvPr>
@@ -7681,8 +7621,8 @@
         </p:blipFill>
         <p:spPr>
           <a:xfrm>
-            <a:off x="2585760" y="880826"/>
-            <a:ext cx="3972479" cy="3381847"/>
+            <a:off x="1768089" y="1099922"/>
+            <a:ext cx="5534797" cy="3086531"/>
           </a:xfrm>
           <a:prstGeom prst="rect">
             <a:avLst/>
@@ -7775,10 +7715,10 @@
       </p:sp>
       <p:pic>
         <p:nvPicPr>
-          <p:cNvPr id="3" name="Imagen 2">
+          <p:cNvPr id="4" name="Imagen 3">
             <a:extLst>
               <a:ext uri="{FF2B5EF4-FFF2-40B4-BE49-F238E27FC236}">
-                <a16:creationId xmlns:a16="http://schemas.microsoft.com/office/drawing/2014/main" id="{8508EBA0-9690-2358-C26B-858B59DD0342}"/>
+                <a16:creationId xmlns:a16="http://schemas.microsoft.com/office/drawing/2014/main" id="{234923CD-2AF6-23DC-57EB-A7AB9D819299}"/>
               </a:ext>
             </a:extLst>
           </p:cNvPr>
@@ -7795,8 +7735,8 @@
         </p:blipFill>
         <p:spPr>
           <a:xfrm>
-            <a:off x="0" y="1001185"/>
-            <a:ext cx="9144000" cy="3284006"/>
+            <a:off x="0" y="940136"/>
+            <a:ext cx="9144000" cy="3406103"/>
           </a:xfrm>
           <a:prstGeom prst="rect">
             <a:avLst/>
@@ -7889,10 +7829,10 @@
       </p:sp>
       <p:pic>
         <p:nvPicPr>
-          <p:cNvPr id="2" name="Imagen 1">
+          <p:cNvPr id="3" name="Imagen 2">
             <a:extLst>
               <a:ext uri="{FF2B5EF4-FFF2-40B4-BE49-F238E27FC236}">
-                <a16:creationId xmlns:a16="http://schemas.microsoft.com/office/drawing/2014/main" id="{7F26B5A6-45D2-6914-5439-AD49EB2F9E83}"/>
+                <a16:creationId xmlns:a16="http://schemas.microsoft.com/office/drawing/2014/main" id="{61923B73-3CAC-877E-D924-AAD2B06343CB}"/>
               </a:ext>
             </a:extLst>
           </p:cNvPr>
@@ -7909,8 +7849,8 @@
         </p:blipFill>
         <p:spPr>
           <a:xfrm>
-            <a:off x="1106488" y="1115316"/>
-            <a:ext cx="6858000" cy="3281645"/>
+            <a:off x="1106488" y="914940"/>
+            <a:ext cx="6858000" cy="3456495"/>
           </a:xfrm>
           <a:prstGeom prst="rect">
             <a:avLst/>
@@ -8003,10 +7943,10 @@
       </p:sp>
       <p:pic>
         <p:nvPicPr>
-          <p:cNvPr id="2" name="Imagen 1">
+          <p:cNvPr id="3" name="Imagen 2">
             <a:extLst>
               <a:ext uri="{FF2B5EF4-FFF2-40B4-BE49-F238E27FC236}">
-                <a16:creationId xmlns:a16="http://schemas.microsoft.com/office/drawing/2014/main" id="{BEF73572-5819-F12B-0151-5C17AFFBB3F6}"/>
+                <a16:creationId xmlns:a16="http://schemas.microsoft.com/office/drawing/2014/main" id="{00BD44CF-218A-B39B-31BC-FAD525015AC7}"/>
               </a:ext>
             </a:extLst>
           </p:cNvPr>
@@ -8023,8 +7963,8 @@
         </p:blipFill>
         <p:spPr>
           <a:xfrm>
-            <a:off x="1106488" y="930927"/>
-            <a:ext cx="6858000" cy="3281645"/>
+            <a:off x="1143000" y="843502"/>
+            <a:ext cx="6858000" cy="3456495"/>
           </a:xfrm>
           <a:prstGeom prst="rect">
             <a:avLst/>
@@ -8121,10 +8061,10 @@
       </p:sp>
       <p:pic>
         <p:nvPicPr>
-          <p:cNvPr id="4" name="Imagen 3">
+          <p:cNvPr id="3" name="Imagen 2">
             <a:extLst>
               <a:ext uri="{FF2B5EF4-FFF2-40B4-BE49-F238E27FC236}">
-                <a16:creationId xmlns:a16="http://schemas.microsoft.com/office/drawing/2014/main" id="{F8593D54-5A85-2B81-6933-3649B180EDC1}"/>
+                <a16:creationId xmlns:a16="http://schemas.microsoft.com/office/drawing/2014/main" id="{609A3C8B-FDB1-154B-137E-D68D0C5F0F28}"/>
               </a:ext>
             </a:extLst>
           </p:cNvPr>
@@ -8141,38 +8081,8 @@
         </p:blipFill>
         <p:spPr>
           <a:xfrm>
-            <a:off x="0" y="521758"/>
-            <a:ext cx="9144000" cy="2688987"/>
-          </a:xfrm>
-          <a:prstGeom prst="rect">
-            <a:avLst/>
-          </a:prstGeom>
-        </p:spPr>
-      </p:pic>
-      <p:pic>
-        <p:nvPicPr>
-          <p:cNvPr id="6" name="Imagen 5">
-            <a:extLst>
-              <a:ext uri="{FF2B5EF4-FFF2-40B4-BE49-F238E27FC236}">
-                <a16:creationId xmlns:a16="http://schemas.microsoft.com/office/drawing/2014/main" id="{DB9CB977-C078-AD09-C16F-EF8D995C9791}"/>
-              </a:ext>
-            </a:extLst>
-          </p:cNvPr>
-          <p:cNvPicPr>
-            <a:picLocks noChangeAspect="1"/>
-          </p:cNvPicPr>
-          <p:nvPr/>
-        </p:nvPicPr>
-        <p:blipFill>
-          <a:blip r:embed="rId4"/>
-          <a:stretch>
-            <a:fillRect/>
-          </a:stretch>
-        </p:blipFill>
-        <p:spPr>
-          <a:xfrm>
-            <a:off x="-8626" y="3210745"/>
-            <a:ext cx="9144000" cy="1681572"/>
+            <a:off x="613810" y="1338090"/>
+            <a:ext cx="7916380" cy="2467319"/>
           </a:xfrm>
           <a:prstGeom prst="rect">
             <a:avLst/>
